--- a/zig/pkg/inference/src/documents/testdata/hidden-slides.pptx
+++ b/zig/pkg/inference/src/documents/testdata/hidden-slides.pptx
@@ -1,6 +1,6 @@
 
 <file path=ppt/presentation.xml><?xml version="1.0" encoding="utf-8"?>
-<p:presentation xmlns:p="p" xmlns:r="r">
+<p:presentation xmlns:p="http://schemas.openxmlformats.org/presentationml/2006/main" xmlns:r="http://schemas.openxmlformats.org/officeDocument/2006/relationships">
   <p:sldIdLst>
     <p:sldId id="1" r:id="second"/>
     <p:sldId id="2" r:id="first"/>
@@ -9,21 +9,33 @@
 </file>
 
 <file path=ppt/slides/slide1.xml><?xml version="1.0" encoding="utf-8"?>
-<p:sld xmlns:p="p" xmlns:a="a">
-  <a:p>
-    <a:r>
-      <a:t>Slide 1</a:t>
-    </a:r>
-  </a:p>
+<p:sld xmlns:a="http://schemas.openxmlformats.org/drawingml/2006/main" xmlns:p="http://schemas.openxmlformats.org/presentationml/2006/main">
+  <p:sp>
+    <p:txBody>
+      <a:bodyPr/>
+      <a:lstStyle/>
+      <a:p>
+        <a:r>
+          <a:t>Slide 1</a:t>
+        </a:r>
+      </a:p>
+    </p:txBody>
+  </p:sp>
 </p:sld>
 </file>
 
 <file path=ppt/slides/slide2.xml><?xml version="1.0" encoding="utf-8"?>
-<p:sld xmlns:p="p" xmlns:a="a" show="0">
-  <a:p>
-    <a:r>
-      <a:t>Slide 2</a:t>
-    </a:r>
-  </a:p>
+<p:sld xmlns:a="http://schemas.openxmlformats.org/drawingml/2006/main" xmlns:p="http://schemas.openxmlformats.org/presentationml/2006/main" show="0">
+  <p:sp>
+    <p:txBody>
+      <a:bodyPr/>
+      <a:lstStyle/>
+      <a:p>
+        <a:r>
+          <a:t>Slide 2</a:t>
+        </a:r>
+      </a:p>
+    </p:txBody>
+  </p:sp>
 </p:sld>
 </file>